--- a/src/core/pptx/__tests__/fixtures/e2e/smartart-build-reveal.pptx
+++ b/src/core/pptx/__tests__/fixtures/e2e/smartart-build-reveal.pptx
@@ -283,7 +283,9 @@
           <a:ext cx="5562600" cy="1019175"/>
         </a:xfrm>
         <a:prstGeom prst="roundRect">
-          <a:avLst/>
+          <a:avLst>
+            <a:gd name="adj" fmla="val 16667"/>
+          </a:avLst>
         </a:prstGeom>
         <a:solidFill>
           <a:srgbClr val="4472C4"/>
@@ -342,7 +344,9 @@
           <a:ext cx="5562600" cy="1019175"/>
         </a:xfrm>
         <a:prstGeom prst="roundRect">
-          <a:avLst/>
+          <a:avLst>
+            <a:gd name="adj" fmla="val 16667"/>
+          </a:avLst>
         </a:prstGeom>
         <a:solidFill>
           <a:srgbClr val="ED7D31"/>
@@ -401,7 +405,9 @@
           <a:ext cx="5562600" cy="1019175"/>
         </a:xfrm>
         <a:prstGeom prst="roundRect">
-          <a:avLst/>
+          <a:avLst>
+            <a:gd name="adj" fmla="val 16667"/>
+          </a:avLst>
         </a:prstGeom>
         <a:solidFill>
           <a:srgbClr val="A5A5A5"/>
@@ -1000,12 +1006,10 @@
           <a:bodyPr wrap="square"/>
           <a:lstStyle/>
           <a:p>
-            <a:pPr/>
             <a:r>
-              <a:rPr lang="en-US" dirty="0" sz="2400" b="1"/>
+              <a:rPr lang="en-US" sz="2400" b="1" dirty="0"/>
               <a:t>SmartArt Build Reveal Slide</a:t>
             </a:r>
-            <a:endParaRPr lang="en-US"/>
           </a:p>
         </p:txBody>
       </p:sp>
@@ -1066,7 +1070,7 @@
                                         <p:tgtEl>
                                           <p:spTgt spid="87">
                                             <p:graphicEl>
-                                              <p:dgm id="{00000000-0000-4000-8000-000000000011}" bldStep="sp"/>
+                                              <a:dgm id="{00000000-0000-4000-8000-000000000011}" bldStep="sp"/>
                                             </p:graphicEl>
                                           </p:spTgt>
                                         </p:tgtEl>
@@ -1084,7 +1088,7 @@
                                         <p:tgtEl>
                                           <p:spTgt spid="87">
                                             <p:graphicEl>
-                                              <p:dgm id="{00000000-0000-4000-8000-000000000011}" bldStep="sp"/>
+                                              <a:dgm id="{00000000-0000-4000-8000-000000000011}" bldStep="sp"/>
                                             </p:graphicEl>
                                           </p:spTgt>
                                         </p:tgtEl>
@@ -1127,7 +1131,7 @@
                                         <p:tgtEl>
                                           <p:spTgt spid="87">
                                             <p:graphicEl>
-                                              <p:dgm id="{00000000-0000-4000-8000-000000000006}" bldStep="sp"/>
+                                              <a:dgm id="{00000000-0000-4000-8000-000000000006}" bldStep="sp"/>
                                             </p:graphicEl>
                                           </p:spTgt>
                                         </p:tgtEl>
@@ -1145,7 +1149,7 @@
                                         <p:tgtEl>
                                           <p:spTgt spid="87">
                                             <p:graphicEl>
-                                              <p:dgm id="{00000000-0000-4000-8000-000000000006}" bldStep="sp"/>
+                                              <a:dgm id="{00000000-0000-4000-8000-000000000006}" bldStep="sp"/>
                                             </p:graphicEl>
                                           </p:spTgt>
                                         </p:tgtEl>
@@ -1188,7 +1192,7 @@
                                         <p:tgtEl>
                                           <p:spTgt spid="87">
                                             <p:graphicEl>
-                                              <p:dgm id="{00000000-0000-4000-8000-000000000001}" bldStep="sp"/>
+                                              <a:dgm id="{00000000-0000-4000-8000-000000000001}" bldStep="sp"/>
                                             </p:graphicEl>
                                           </p:spTgt>
                                         </p:tgtEl>
@@ -1206,7 +1210,7 @@
                                         <p:tgtEl>
                                           <p:spTgt spid="87">
                                             <p:graphicEl>
-                                              <p:dgm id="{00000000-0000-4000-8000-000000000001}" bldStep="sp"/>
+                                              <a:dgm id="{00000000-0000-4000-8000-000000000001}" bldStep="sp"/>
                                             </p:graphicEl>
                                           </p:spTgt>
                                         </p:tgtEl>
